--- a/Presentation1.pptx
+++ b/Presentation1.pptx
@@ -117,20 +117,12 @@
 </p:presentation>
 </file>
 
-<file path=ppt/revisionInfo.xml><?xml version="1.0" encoding="utf-8"?>
-<p1510:revInfo xmlns:a="http://schemas.openxmlformats.org/drawingml/2006/main" xmlns:r="http://schemas.openxmlformats.org/officeDocument/2006/relationships" xmlns:p1510="http://schemas.microsoft.com/office/powerpoint/2015/10/main">
-  <p1510:revLst>
-    <p1510:client id="{B800B430-C434-49C5-880A-74EC2878C272}" v="44" dt="2026-08-21T09:27:51.252"/>
-  </p1510:revLst>
-</p1510:revInfo>
-</file>
-
 <file path=ppt/changesInfos/changesInfo1.xml><?xml version="1.0" encoding="utf-8"?>
 <pc:chgInfo xmlns:a="http://schemas.openxmlformats.org/drawingml/2006/main" xmlns:r="http://schemas.openxmlformats.org/officeDocument/2006/relationships" xmlns:ac="http://schemas.microsoft.com/office/drawing/2013/main/command" xmlns:pc="http://schemas.microsoft.com/office/powerpoint/2013/main/command">
   <pc:docChgLst>
     <pc:chgData name="ADIB K.M SHAHRIAR ALAM" userId="cb92b437-61af-4681-a72a-625e33bfc357" providerId="ADAL" clId="{FD585106-175F-46C4-A373-692172758B21}"/>
     <pc:docChg chg="undo redo custSel addSld modSld">
-      <pc:chgData name="ADIB K.M SHAHRIAR ALAM" userId="cb92b437-61af-4681-a72a-625e33bfc357" providerId="ADAL" clId="{FD585106-175F-46C4-A373-692172758B21}" dt="2026-08-21T09:29:52.007" v="1755" actId="2711"/>
+      <pc:chgData name="ADIB K.M SHAHRIAR ALAM" userId="cb92b437-61af-4681-a72a-625e33bfc357" providerId="ADAL" clId="{FD585106-175F-46C4-A373-692172758B21}" dt="2026-09-03T16:28:24.816" v="1757" actId="20577"/>
       <pc:docMkLst>
         <pc:docMk/>
       </pc:docMkLst>
@@ -542,7 +534,7 @@
         </pc:cxnChg>
       </pc:sldChg>
       <pc:sldChg chg="addSp delSp modSp new mod">
-        <pc:chgData name="ADIB K.M SHAHRIAR ALAM" userId="cb92b437-61af-4681-a72a-625e33bfc357" providerId="ADAL" clId="{FD585106-175F-46C4-A373-692172758B21}" dt="2026-08-21T09:29:52.007" v="1755" actId="2711"/>
+        <pc:chgData name="ADIB K.M SHAHRIAR ALAM" userId="cb92b437-61af-4681-a72a-625e33bfc357" providerId="ADAL" clId="{FD585106-175F-46C4-A373-692172758B21}" dt="2026-09-03T16:28:24.816" v="1757" actId="20577"/>
         <pc:sldMkLst>
           <pc:docMk/>
           <pc:sldMk cId="2582088956" sldId="258"/>
@@ -555,44 +547,12 @@
             <ac:spMk id="2" creationId="{DD977104-27FC-AF28-D939-A7B28F0D0C43}"/>
           </ac:spMkLst>
         </pc:spChg>
-        <pc:spChg chg="del">
-          <ac:chgData name="ADIB K.M SHAHRIAR ALAM" userId="cb92b437-61af-4681-a72a-625e33bfc357" providerId="ADAL" clId="{FD585106-175F-46C4-A373-692172758B21}" dt="2026-08-20T23:14:08.929" v="1267" actId="478"/>
-          <ac:spMkLst>
-            <pc:docMk/>
-            <pc:sldMk cId="2582088956" sldId="258"/>
-            <ac:spMk id="5" creationId="{F10C2EBD-BC75-AD08-8724-92D03E648F62}"/>
-          </ac:spMkLst>
-        </pc:spChg>
-        <pc:spChg chg="del mod">
-          <ac:chgData name="ADIB K.M SHAHRIAR ALAM" userId="cb92b437-61af-4681-a72a-625e33bfc357" providerId="ADAL" clId="{FD585106-175F-46C4-A373-692172758B21}" dt="2026-08-20T23:56:45.501" v="1404" actId="478"/>
-          <ac:spMkLst>
-            <pc:docMk/>
-            <pc:sldMk cId="2582088956" sldId="258"/>
-            <ac:spMk id="7" creationId="{E104C2AB-2216-CC33-2FDF-CF5A9DB6300F}"/>
-          </ac:spMkLst>
-        </pc:spChg>
         <pc:spChg chg="mod">
           <ac:chgData name="ADIB K.M SHAHRIAR ALAM" userId="cb92b437-61af-4681-a72a-625e33bfc357" providerId="ADAL" clId="{FD585106-175F-46C4-A373-692172758B21}" dt="2026-08-20T23:55:30.204" v="1369" actId="1076"/>
           <ac:spMkLst>
             <pc:docMk/>
             <pc:sldMk cId="2582088956" sldId="258"/>
             <ac:spMk id="8" creationId="{384946C0-02EE-0E39-1823-4DD33ADD6113}"/>
-          </ac:spMkLst>
-        </pc:spChg>
-        <pc:spChg chg="add del mod">
-          <ac:chgData name="ADIB K.M SHAHRIAR ALAM" userId="cb92b437-61af-4681-a72a-625e33bfc357" providerId="ADAL" clId="{FD585106-175F-46C4-A373-692172758B21}" dt="2026-08-21T03:50:15.014" v="1451" actId="478"/>
-          <ac:spMkLst>
-            <pc:docMk/>
-            <pc:sldMk cId="2582088956" sldId="258"/>
-            <ac:spMk id="9" creationId="{C84A26EA-30BD-F451-E7F3-257CBAC847FE}"/>
-          </ac:spMkLst>
-        </pc:spChg>
-        <pc:spChg chg="del mod">
-          <ac:chgData name="ADIB K.M SHAHRIAR ALAM" userId="cb92b437-61af-4681-a72a-625e33bfc357" providerId="ADAL" clId="{FD585106-175F-46C4-A373-692172758B21}" dt="2026-08-21T03:51:38.635" v="1463" actId="478"/>
-          <ac:spMkLst>
-            <pc:docMk/>
-            <pc:sldMk cId="2582088956" sldId="258"/>
-            <ac:spMk id="10" creationId="{C678ED82-FD8B-3FE2-2BBB-53C657054040}"/>
           </ac:spMkLst>
         </pc:spChg>
         <pc:spChg chg="mod">
@@ -603,36 +563,12 @@
             <ac:spMk id="11" creationId="{0EBF327C-1D52-96F0-6486-F38EBAB3CCBD}"/>
           </ac:spMkLst>
         </pc:spChg>
-        <pc:spChg chg="add del mod">
-          <ac:chgData name="ADIB K.M SHAHRIAR ALAM" userId="cb92b437-61af-4681-a72a-625e33bfc357" providerId="ADAL" clId="{FD585106-175F-46C4-A373-692172758B21}" dt="2026-08-20T23:14:05.772" v="1266" actId="478"/>
-          <ac:spMkLst>
-            <pc:docMk/>
-            <pc:sldMk cId="2582088956" sldId="258"/>
-            <ac:spMk id="12" creationId="{41770124-CAF1-8C4B-98E1-9BB7CE984E6B}"/>
-          </ac:spMkLst>
-        </pc:spChg>
         <pc:spChg chg="mod">
           <ac:chgData name="ADIB K.M SHAHRIAR ALAM" userId="cb92b437-61af-4681-a72a-625e33bfc357" providerId="ADAL" clId="{FD585106-175F-46C4-A373-692172758B21}" dt="2026-08-21T09:29:52.007" v="1755" actId="2711"/>
           <ac:spMkLst>
             <pc:docMk/>
             <pc:sldMk cId="2582088956" sldId="258"/>
             <ac:spMk id="13" creationId="{DE7E26A7-1B0E-9D34-9944-8E6BF26095A9}"/>
-          </ac:spMkLst>
-        </pc:spChg>
-        <pc:spChg chg="add del mod">
-          <ac:chgData name="ADIB K.M SHAHRIAR ALAM" userId="cb92b437-61af-4681-a72a-625e33bfc357" providerId="ADAL" clId="{FD585106-175F-46C4-A373-692172758B21}" dt="2026-08-20T23:56:47.315" v="1405" actId="478"/>
-          <ac:spMkLst>
-            <pc:docMk/>
-            <pc:sldMk cId="2582088956" sldId="258"/>
-            <ac:spMk id="15" creationId="{C03AB245-4A59-F7C9-FF46-C2190EBEFA6A}"/>
-          </ac:spMkLst>
-        </pc:spChg>
-        <pc:spChg chg="del">
-          <ac:chgData name="ADIB K.M SHAHRIAR ALAM" userId="cb92b437-61af-4681-a72a-625e33bfc357" providerId="ADAL" clId="{FD585106-175F-46C4-A373-692172758B21}" dt="2026-08-20T23:56:48.603" v="1406" actId="478"/>
-          <ac:spMkLst>
-            <pc:docMk/>
-            <pc:sldMk cId="2582088956" sldId="258"/>
-            <ac:spMk id="16" creationId="{14BE767C-0A3F-AB3A-0469-9569C3D55AB8}"/>
           </ac:spMkLst>
         </pc:spChg>
         <pc:spChg chg="mod">
@@ -659,52 +595,12 @@
             <ac:spMk id="19" creationId="{0B5E717C-CD08-C3A5-CB84-D643630E7274}"/>
           </ac:spMkLst>
         </pc:spChg>
-        <pc:spChg chg="del">
-          <ac:chgData name="ADIB K.M SHAHRIAR ALAM" userId="cb92b437-61af-4681-a72a-625e33bfc357" providerId="ADAL" clId="{FD585106-175F-46C4-A373-692172758B21}" dt="2026-08-21T03:49:03.692" v="1417" actId="478"/>
-          <ac:spMkLst>
-            <pc:docMk/>
-            <pc:sldMk cId="2582088956" sldId="258"/>
-            <ac:spMk id="20" creationId="{E14147D8-2946-7BCB-6BC1-C5F024428E4D}"/>
-          </ac:spMkLst>
-        </pc:spChg>
-        <pc:spChg chg="del mod">
-          <ac:chgData name="ADIB K.M SHAHRIAR ALAM" userId="cb92b437-61af-4681-a72a-625e33bfc357" providerId="ADAL" clId="{FD585106-175F-46C4-A373-692172758B21}" dt="2026-08-21T03:49:04.867" v="1418" actId="478"/>
-          <ac:spMkLst>
-            <pc:docMk/>
-            <pc:sldMk cId="2582088956" sldId="258"/>
-            <ac:spMk id="21" creationId="{7361B76D-C4DC-28D7-08BC-DA5A9141D15D}"/>
-          </ac:spMkLst>
-        </pc:spChg>
-        <pc:spChg chg="del">
-          <ac:chgData name="ADIB K.M SHAHRIAR ALAM" userId="cb92b437-61af-4681-a72a-625e33bfc357" providerId="ADAL" clId="{FD585106-175F-46C4-A373-692172758B21}" dt="2026-08-21T03:49:05.510" v="1419" actId="478"/>
-          <ac:spMkLst>
-            <pc:docMk/>
-            <pc:sldMk cId="2582088956" sldId="258"/>
-            <ac:spMk id="22" creationId="{BC40C31D-5818-F3A4-DCA2-E933A336876A}"/>
-          </ac:spMkLst>
-        </pc:spChg>
         <pc:spChg chg="mod">
           <ac:chgData name="ADIB K.M SHAHRIAR ALAM" userId="cb92b437-61af-4681-a72a-625e33bfc357" providerId="ADAL" clId="{FD585106-175F-46C4-A373-692172758B21}" dt="2026-08-21T09:29:52.007" v="1755" actId="2711"/>
           <ac:spMkLst>
             <pc:docMk/>
             <pc:sldMk cId="2582088956" sldId="258"/>
             <ac:spMk id="23" creationId="{C801D565-91F0-CCDD-9145-7619C3F0E184}"/>
-          </ac:spMkLst>
-        </pc:spChg>
-        <pc:spChg chg="add del mod">
-          <ac:chgData name="ADIB K.M SHAHRIAR ALAM" userId="cb92b437-61af-4681-a72a-625e33bfc357" providerId="ADAL" clId="{FD585106-175F-46C4-A373-692172758B21}" dt="2026-08-21T03:52:00.578" v="1466" actId="478"/>
-          <ac:spMkLst>
-            <pc:docMk/>
-            <pc:sldMk cId="2582088956" sldId="258"/>
-            <ac:spMk id="27" creationId="{52795FE5-29D9-7D4B-9F98-20C921F0A336}"/>
-          </ac:spMkLst>
-        </pc:spChg>
-        <pc:spChg chg="del">
-          <ac:chgData name="ADIB K.M SHAHRIAR ALAM" userId="cb92b437-61af-4681-a72a-625e33bfc357" providerId="ADAL" clId="{FD585106-175F-46C4-A373-692172758B21}" dt="2026-08-21T03:51:57.989" v="1465" actId="478"/>
-          <ac:spMkLst>
-            <pc:docMk/>
-            <pc:sldMk cId="2582088956" sldId="258"/>
-            <ac:spMk id="28" creationId="{853BF278-7937-29D8-3380-DF4F52FDAA1E}"/>
           </ac:spMkLst>
         </pc:spChg>
         <pc:spChg chg="add mod">
@@ -715,28 +611,12 @@
             <ac:spMk id="29" creationId="{C2F4740F-B468-4F52-9FF5-FCB3E694399B}"/>
           </ac:spMkLst>
         </pc:spChg>
-        <pc:spChg chg="del">
-          <ac:chgData name="ADIB K.M SHAHRIAR ALAM" userId="cb92b437-61af-4681-a72a-625e33bfc357" providerId="ADAL" clId="{FD585106-175F-46C4-A373-692172758B21}" dt="2026-08-21T09:12:27.721" v="1468" actId="478"/>
-          <ac:spMkLst>
-            <pc:docMk/>
-            <pc:sldMk cId="2582088956" sldId="258"/>
-            <ac:spMk id="36" creationId="{C1DF81A3-5A8B-666A-38D9-647815CCA6BB}"/>
-          </ac:spMkLst>
-        </pc:spChg>
         <pc:spChg chg="mod">
           <ac:chgData name="ADIB K.M SHAHRIAR ALAM" userId="cb92b437-61af-4681-a72a-625e33bfc357" providerId="ADAL" clId="{FD585106-175F-46C4-A373-692172758B21}" dt="2026-08-21T09:29:52.007" v="1755" actId="2711"/>
           <ac:spMkLst>
             <pc:docMk/>
             <pc:sldMk cId="2582088956" sldId="258"/>
             <ac:spMk id="37" creationId="{AA31FF73-EA85-EFDF-E4AB-5F99F5A20515}"/>
-          </ac:spMkLst>
-        </pc:spChg>
-        <pc:spChg chg="del">
-          <ac:chgData name="ADIB K.M SHAHRIAR ALAM" userId="cb92b437-61af-4681-a72a-625e33bfc357" providerId="ADAL" clId="{FD585106-175F-46C4-A373-692172758B21}" dt="2026-08-21T09:16:59.243" v="1542" actId="478"/>
-          <ac:spMkLst>
-            <pc:docMk/>
-            <pc:sldMk cId="2582088956" sldId="258"/>
-            <ac:spMk id="38" creationId="{F74696DF-DBB9-422F-6B56-68E57B7005D5}"/>
           </ac:spMkLst>
         </pc:spChg>
         <pc:spChg chg="mod">
@@ -747,44 +627,12 @@
             <ac:spMk id="39" creationId="{6580A65F-9C97-9943-07CA-B1081D53D18A}"/>
           </ac:spMkLst>
         </pc:spChg>
-        <pc:spChg chg="del">
-          <ac:chgData name="ADIB K.M SHAHRIAR ALAM" userId="cb92b437-61af-4681-a72a-625e33bfc357" providerId="ADAL" clId="{FD585106-175F-46C4-A373-692172758B21}" dt="2026-08-21T09:18:09.098" v="1576" actId="478"/>
-          <ac:spMkLst>
-            <pc:docMk/>
-            <pc:sldMk cId="2582088956" sldId="258"/>
-            <ac:spMk id="40" creationId="{9D24A3FD-28A0-8F89-7100-7D1FA1240F5C}"/>
-          </ac:spMkLst>
-        </pc:spChg>
         <pc:spChg chg="add mod">
           <ac:chgData name="ADIB K.M SHAHRIAR ALAM" userId="cb92b437-61af-4681-a72a-625e33bfc357" providerId="ADAL" clId="{FD585106-175F-46C4-A373-692172758B21}" dt="2026-08-21T09:18:29.796" v="1580" actId="1076"/>
           <ac:spMkLst>
             <pc:docMk/>
             <pc:sldMk cId="2582088956" sldId="258"/>
             <ac:spMk id="41" creationId="{2F27FA8F-1BCC-DAE4-67BA-A71A810D5E60}"/>
-          </ac:spMkLst>
-        </pc:spChg>
-        <pc:spChg chg="del">
-          <ac:chgData name="ADIB K.M SHAHRIAR ALAM" userId="cb92b437-61af-4681-a72a-625e33bfc357" providerId="ADAL" clId="{FD585106-175F-46C4-A373-692172758B21}" dt="2026-08-21T09:12:24.142" v="1467" actId="478"/>
-          <ac:spMkLst>
-            <pc:docMk/>
-            <pc:sldMk cId="2582088956" sldId="258"/>
-            <ac:spMk id="43" creationId="{AC9703AA-2D39-71A9-8B69-66D07F816067}"/>
-          </ac:spMkLst>
-        </pc:spChg>
-        <pc:spChg chg="add del mod">
-          <ac:chgData name="ADIB K.M SHAHRIAR ALAM" userId="cb92b437-61af-4681-a72a-625e33bfc357" providerId="ADAL" clId="{FD585106-175F-46C4-A373-692172758B21}" dt="2026-08-21T09:16:38.621" v="1531" actId="478"/>
-          <ac:spMkLst>
-            <pc:docMk/>
-            <pc:sldMk cId="2582088956" sldId="258"/>
-            <ac:spMk id="46" creationId="{5F893380-A420-B604-39A0-1D3E998A9A14}"/>
-          </ac:spMkLst>
-        </pc:spChg>
-        <pc:spChg chg="del">
-          <ac:chgData name="ADIB K.M SHAHRIAR ALAM" userId="cb92b437-61af-4681-a72a-625e33bfc357" providerId="ADAL" clId="{FD585106-175F-46C4-A373-692172758B21}" dt="2026-08-21T09:16:39.412" v="1532" actId="478"/>
-          <ac:spMkLst>
-            <pc:docMk/>
-            <pc:sldMk cId="2582088956" sldId="258"/>
-            <ac:spMk id="47" creationId="{01D382B4-487C-04B4-0C43-027CD2856282}"/>
           </ac:spMkLst>
         </pc:spChg>
         <pc:spChg chg="mod">
@@ -811,28 +659,12 @@
             <ac:spMk id="50" creationId="{1532AEC0-8E7D-F497-F336-92ADFA7DC36B}"/>
           </ac:spMkLst>
         </pc:spChg>
-        <pc:spChg chg="del">
-          <ac:chgData name="ADIB K.M SHAHRIAR ALAM" userId="cb92b437-61af-4681-a72a-625e33bfc357" providerId="ADAL" clId="{FD585106-175F-46C4-A373-692172758B21}" dt="2026-08-21T09:18:32.894" v="1581" actId="478"/>
-          <ac:spMkLst>
-            <pc:docMk/>
-            <pc:sldMk cId="2582088956" sldId="258"/>
-            <ac:spMk id="51" creationId="{DDBAD7D0-2716-2147-B081-845C9CCAEB1E}"/>
-          </ac:spMkLst>
-        </pc:spChg>
         <pc:spChg chg="add mod">
           <ac:chgData name="ADIB K.M SHAHRIAR ALAM" userId="cb92b437-61af-4681-a72a-625e33bfc357" providerId="ADAL" clId="{FD585106-175F-46C4-A373-692172758B21}" dt="2026-08-21T09:18:38.146" v="1583" actId="1076"/>
           <ac:spMkLst>
             <pc:docMk/>
             <pc:sldMk cId="2582088956" sldId="258"/>
             <ac:spMk id="52" creationId="{6FCE6C98-5AC0-C773-8DB2-56B3FDB54AAE}"/>
-          </ac:spMkLst>
-        </pc:spChg>
-        <pc:spChg chg="del">
-          <ac:chgData name="ADIB K.M SHAHRIAR ALAM" userId="cb92b437-61af-4681-a72a-625e33bfc357" providerId="ADAL" clId="{FD585106-175F-46C4-A373-692172758B21}" dt="2026-08-21T09:18:33.959" v="1582" actId="478"/>
-          <ac:spMkLst>
-            <pc:docMk/>
-            <pc:sldMk cId="2582088956" sldId="258"/>
-            <ac:spMk id="53" creationId="{298120CE-3D6B-10DF-5444-C9F1768CE257}"/>
           </ac:spMkLst>
         </pc:spChg>
         <pc:spChg chg="mod">
@@ -873,14 +705,6 @@
             <pc:docMk/>
             <pc:sldMk cId="2582088956" sldId="258"/>
             <ac:spMk id="63" creationId="{B2F4FC6D-5177-413A-88A4-B885FEB291C5}"/>
-          </ac:spMkLst>
-        </pc:spChg>
-        <pc:spChg chg="add mod">
-          <ac:chgData name="ADIB K.M SHAHRIAR ALAM" userId="cb92b437-61af-4681-a72a-625e33bfc357" providerId="ADAL" clId="{FD585106-175F-46C4-A373-692172758B21}" dt="2026-08-21T03:50:53.857" v="1459" actId="571"/>
-          <ac:spMkLst>
-            <pc:docMk/>
-            <pc:sldMk cId="2582088956" sldId="258"/>
-            <ac:spMk id="64" creationId="{F7E8D056-E42A-26FC-3001-4C96D96D2D57}"/>
           </ac:spMkLst>
         </pc:spChg>
         <pc:spChg chg="add mod">
@@ -947,16 +771,8 @@
             <ac:spMk id="72" creationId="{341FFA09-A06D-D3AC-955C-58B4DA73990E}"/>
           </ac:spMkLst>
         </pc:spChg>
-        <pc:graphicFrameChg chg="add mod">
-          <ac:chgData name="ADIB K.M SHAHRIAR ALAM" userId="cb92b437-61af-4681-a72a-625e33bfc357" providerId="ADAL" clId="{FD585106-175F-46C4-A373-692172758B21}" dt="2026-08-21T03:50:53.857" v="1459" actId="571"/>
-          <ac:graphicFrameMkLst>
-            <pc:docMk/>
-            <pc:sldMk cId="2582088956" sldId="258"/>
-            <ac:graphicFrameMk id="3" creationId="{33D237AF-EF9C-55AF-A110-E686C315D822}"/>
-          </ac:graphicFrameMkLst>
-        </pc:graphicFrameChg>
         <pc:graphicFrameChg chg="mod modGraphic">
-          <ac:chgData name="ADIB K.M SHAHRIAR ALAM" userId="cb92b437-61af-4681-a72a-625e33bfc357" providerId="ADAL" clId="{FD585106-175F-46C4-A373-692172758B21}" dt="2026-08-21T09:25:28.063" v="1587"/>
+          <ac:chgData name="ADIB K.M SHAHRIAR ALAM" userId="cb92b437-61af-4681-a72a-625e33bfc357" providerId="ADAL" clId="{FD585106-175F-46C4-A373-692172758B21}" dt="2026-09-03T16:28:24.816" v="1757" actId="20577"/>
           <ac:graphicFrameMkLst>
             <pc:docMk/>
             <pc:sldMk cId="2582088956" sldId="258"/>
@@ -1067,7 +883,7 @@
           <a:p>
             <a:fld id="{EDDA3D39-2ED6-4C81-894D-2070B4EB6C87}" type="datetimeFigureOut">
               <a:rPr lang="en-US" smtClean="0"/>
-              <a:t>8/21/2026</a:t>
+              <a:t>9/4/2026</a:t>
             </a:fld>
             <a:endParaRPr lang="en-US"/>
           </a:p>
@@ -1565,7 +1381,7 @@
           <a:p>
             <a:fld id="{4ECB34CE-DDDB-49F0-A0D2-D7F91FC39B4E}" type="datetimeFigureOut">
               <a:rPr lang="en-US" smtClean="0"/>
-              <a:t>8/21/2026</a:t>
+              <a:t>9/4/2026</a:t>
             </a:fld>
             <a:endParaRPr lang="en-US"/>
           </a:p>
@@ -1763,7 +1579,7 @@
           <a:p>
             <a:fld id="{4ECB34CE-DDDB-49F0-A0D2-D7F91FC39B4E}" type="datetimeFigureOut">
               <a:rPr lang="en-US" smtClean="0"/>
-              <a:t>8/21/2026</a:t>
+              <a:t>9/4/2026</a:t>
             </a:fld>
             <a:endParaRPr lang="en-US"/>
           </a:p>
@@ -1971,7 +1787,7 @@
           <a:p>
             <a:fld id="{4ECB34CE-DDDB-49F0-A0D2-D7F91FC39B4E}" type="datetimeFigureOut">
               <a:rPr lang="en-US" smtClean="0"/>
-              <a:t>8/21/2026</a:t>
+              <a:t>9/4/2026</a:t>
             </a:fld>
             <a:endParaRPr lang="en-US"/>
           </a:p>
@@ -2169,7 +1985,7 @@
           <a:p>
             <a:fld id="{4ECB34CE-DDDB-49F0-A0D2-D7F91FC39B4E}" type="datetimeFigureOut">
               <a:rPr lang="en-US" smtClean="0"/>
-              <a:t>8/21/2026</a:t>
+              <a:t>9/4/2026</a:t>
             </a:fld>
             <a:endParaRPr lang="en-US"/>
           </a:p>
@@ -2444,7 +2260,7 @@
           <a:p>
             <a:fld id="{4ECB34CE-DDDB-49F0-A0D2-D7F91FC39B4E}" type="datetimeFigureOut">
               <a:rPr lang="en-US" smtClean="0"/>
-              <a:t>8/21/2026</a:t>
+              <a:t>9/4/2026</a:t>
             </a:fld>
             <a:endParaRPr lang="en-US"/>
           </a:p>
@@ -2709,7 +2525,7 @@
           <a:p>
             <a:fld id="{4ECB34CE-DDDB-49F0-A0D2-D7F91FC39B4E}" type="datetimeFigureOut">
               <a:rPr lang="en-US" smtClean="0"/>
-              <a:t>8/21/2026</a:t>
+              <a:t>9/4/2026</a:t>
             </a:fld>
             <a:endParaRPr lang="en-US"/>
           </a:p>
@@ -3121,7 +2937,7 @@
           <a:p>
             <a:fld id="{4ECB34CE-DDDB-49F0-A0D2-D7F91FC39B4E}" type="datetimeFigureOut">
               <a:rPr lang="en-US" smtClean="0"/>
-              <a:t>8/21/2026</a:t>
+              <a:t>9/4/2026</a:t>
             </a:fld>
             <a:endParaRPr lang="en-US"/>
           </a:p>
@@ -3262,7 +3078,7 @@
           <a:p>
             <a:fld id="{4ECB34CE-DDDB-49F0-A0D2-D7F91FC39B4E}" type="datetimeFigureOut">
               <a:rPr lang="en-US" smtClean="0"/>
-              <a:t>8/21/2026</a:t>
+              <a:t>9/4/2026</a:t>
             </a:fld>
             <a:endParaRPr lang="en-US"/>
           </a:p>
@@ -3375,7 +3191,7 @@
           <a:p>
             <a:fld id="{4ECB34CE-DDDB-49F0-A0D2-D7F91FC39B4E}" type="datetimeFigureOut">
               <a:rPr lang="en-US" smtClean="0"/>
-              <a:t>8/21/2026</a:t>
+              <a:t>9/4/2026</a:t>
             </a:fld>
             <a:endParaRPr lang="en-US"/>
           </a:p>
@@ -3686,7 +3502,7 @@
           <a:p>
             <a:fld id="{4ECB34CE-DDDB-49F0-A0D2-D7F91FC39B4E}" type="datetimeFigureOut">
               <a:rPr lang="en-US" smtClean="0"/>
-              <a:t>8/21/2026</a:t>
+              <a:t>9/4/2026</a:t>
             </a:fld>
             <a:endParaRPr lang="en-US"/>
           </a:p>
@@ -3974,7 +3790,7 @@
           <a:p>
             <a:fld id="{4ECB34CE-DDDB-49F0-A0D2-D7F91FC39B4E}" type="datetimeFigureOut">
               <a:rPr lang="en-US" smtClean="0"/>
-              <a:t>8/21/2026</a:t>
+              <a:t>9/4/2026</a:t>
             </a:fld>
             <a:endParaRPr lang="en-US"/>
           </a:p>
@@ -4215,7 +4031,7 @@
           <a:p>
             <a:fld id="{4ECB34CE-DDDB-49F0-A0D2-D7F91FC39B4E}" type="datetimeFigureOut">
               <a:rPr lang="en-US" smtClean="0"/>
-              <a:t>8/21/2026</a:t>
+              <a:t>9/4/2026</a:t>
             </a:fld>
             <a:endParaRPr lang="en-US"/>
           </a:p>
@@ -13216,7 +13032,7 @@
           <p:nvPr>
             <p:extLst>
               <p:ext uri="{D42A27DB-BD31-4B8C-83A1-F6EECF244321}">
-                <p14:modId xmlns:p14="http://schemas.microsoft.com/office/powerpoint/2010/main" val="1884274204"/>
+                <p14:modId xmlns:p14="http://schemas.microsoft.com/office/powerpoint/2010/main" val="2975537261"/>
               </p:ext>
             </p:extLst>
           </p:nvPr>
@@ -15842,7 +15658,7 @@
                     <a:p>
                       <a:pPr algn="ctr" fontAlgn="ctr"/>
                       <a:r>
-                        <a:rPr lang="en-US" altLang="ja-JP" sz="700" u="none" strike="noStrike" dirty="0">
+                        <a:rPr lang="en-US" altLang="ja-JP" sz="700" u="none" strike="noStrike">
                           <a:effectLst/>
                           <a:latin typeface="Times New Roman" panose="02020603050405020304" pitchFamily="18" charset="0"/>
                           <a:cs typeface="Times New Roman" panose="02020603050405020304" pitchFamily="18" charset="0"/>
